--- a/docs/ppt.pptx
+++ b/docs/ppt.pptx
@@ -9,7 +9,7 @@
     <p:sldMasterId id="2147483657" r:id="rId5"/>
   </p:sldMasterIdLst>
   <p:notesMasterIdLst>
-    <p:notesMasterId r:id="rId16"/>
+    <p:notesMasterId r:id="rId15"/>
   </p:notesMasterIdLst>
   <p:sldIdLst>
     <p:sldId id="271" r:id="rId6"/>
@@ -18,10 +18,9 @@
     <p:sldId id="259" r:id="rId9"/>
     <p:sldId id="260" r:id="rId10"/>
     <p:sldId id="275" r:id="rId11"/>
-    <p:sldId id="273" r:id="rId12"/>
-    <p:sldId id="261" r:id="rId13"/>
-    <p:sldId id="266" r:id="rId14"/>
-    <p:sldId id="270" r:id="rId15"/>
+    <p:sldId id="261" r:id="rId12"/>
+    <p:sldId id="266" r:id="rId13"/>
+    <p:sldId id="270" r:id="rId14"/>
   </p:sldIdLst>
   <p:sldSz cx="9144000" cy="6858000" type="screen4x3"/>
   <p:notesSz cx="7559675" cy="10691813"/>
@@ -131,7 +130,6 @@
             <p14:sldId id="259"/>
             <p14:sldId id="260"/>
             <p14:sldId id="275"/>
-            <p14:sldId id="273"/>
             <p14:sldId id="261"/>
           </p14:sldIdLst>
         </p14:section>
@@ -20750,6 +20748,38 @@
               </a:rPr>
               <a:t>8</a:t>
             </a:r>
+          </a:p>
+          <a:p>
+            <a:pPr marL="0" marR="0" lvl="0" indent="0" algn="ctr" defTabSz="914400" rtl="0" eaLnBrk="1" fontAlgn="auto" latinLnBrk="0" hangingPunct="1">
+              <a:lnSpc>
+                <a:spcPct val="100000"/>
+              </a:lnSpc>
+              <a:spcBef>
+                <a:spcPts val="0"/>
+              </a:spcBef>
+              <a:spcAft>
+                <a:spcPts val="0"/>
+              </a:spcAft>
+              <a:buClr>
+                <a:srgbClr val="000000"/>
+              </a:buClr>
+              <a:buSzPts val="1800"/>
+              <a:buFont typeface="Arial" panose="020B0604020202020204"/>
+              <a:buNone/>
+              <a:defRPr/>
+            </a:pPr>
+            <a:r>
+              <a:rPr lang="en-US" b="1" kern="0" dirty="0" smtClean="0">
+                <a:solidFill>
+                  <a:srgbClr val="1F497D"/>
+                </a:solidFill>
+                <a:latin typeface="Times New Roman" panose="02020603050405020304"/>
+                <a:ea typeface="Times New Roman" panose="02020603050405020304"/>
+                <a:cs typeface="Times New Roman" panose="02020603050405020304"/>
+                <a:sym typeface="Times New Roman" panose="02020603050405020304"/>
+              </a:rPr>
+              <a:t>Project Group No. :11</a:t>
+            </a:r>
             <a:endParaRPr kumimoji="0" sz="1800" b="1" i="0" u="none" strike="noStrike" kern="0" cap="none" spc="0" normalizeH="0" baseline="0" noProof="0" dirty="0">
               <a:ln>
                 <a:noFill/>
@@ -21240,209 +21270,6 @@
               <a:uFillTx/>
               <a:latin typeface="Arial" panose="020B0604020202020204"/>
               <a:ea typeface="Arial" panose="020B0604020202020204"/>
-              <a:cs typeface="Arial" panose="020B0604020202020204"/>
-              <a:sym typeface="Arial" panose="020B0604020202020204"/>
-            </a:endParaRPr>
-          </a:p>
-        </p:txBody>
-      </p:sp>
-    </p:spTree>
-  </p:cSld>
-  <p:clrMapOvr>
-    <a:masterClrMapping/>
-  </p:clrMapOvr>
-</p:sld>
-</file>
-
-<file path=ppt/slides/slide10.xml><?xml version="1.0" encoding="utf-8"?>
-<p:sld xmlns:a="http://schemas.openxmlformats.org/drawingml/2006/main" xmlns:r="http://schemas.openxmlformats.org/officeDocument/2006/relationships" xmlns:p="http://schemas.openxmlformats.org/presentationml/2006/main">
-  <p:cSld>
-    <p:spTree>
-      <p:nvGrpSpPr>
-        <p:cNvPr id="1" name="Shape 101"/>
-        <p:cNvGrpSpPr/>
-        <p:nvPr/>
-      </p:nvGrpSpPr>
-      <p:grpSpPr>
-        <a:xfrm>
-          <a:off x="0" y="0"/>
-          <a:ext cx="0" cy="0"/>
-          <a:chOff x="0" y="0"/>
-          <a:chExt cx="0" cy="0"/>
-        </a:xfrm>
-      </p:grpSpPr>
-      <p:sp>
-        <p:nvSpPr>
-          <p:cNvPr id="102" name="Google Shape;102;g2c78129218a_0_8"/>
-          <p:cNvSpPr txBox="1">
-            <a:spLocks noGrp="1"/>
-          </p:cNvSpPr>
-          <p:nvPr>
-            <p:ph type="sldNum" idx="12"/>
-          </p:nvPr>
-        </p:nvSpPr>
-        <p:spPr>
-          <a:xfrm>
-            <a:off x="6553200" y="6356350"/>
-            <a:ext cx="2133600" cy="365100"/>
-          </a:xfrm>
-          <a:prstGeom prst="rect">
-            <a:avLst/>
-          </a:prstGeom>
-          <a:noFill/>
-          <a:ln>
-            <a:noFill/>
-          </a:ln>
-        </p:spPr>
-        <p:txBody>
-          <a:bodyPr spcFirstLastPara="1" wrap="square" lIns="91425" tIns="45700" rIns="91425" bIns="45700" anchor="ctr" anchorCtr="0">
-            <a:noAutofit/>
-          </a:bodyPr>
-          <a:lstStyle/>
-          <a:p>
-            <a:pPr marL="0" marR="0" lvl="0" indent="0" algn="r" defTabSz="914400" rtl="0" eaLnBrk="1" fontAlgn="auto" latinLnBrk="0" hangingPunct="1">
-              <a:lnSpc>
-                <a:spcPct val="100000"/>
-              </a:lnSpc>
-              <a:spcBef>
-                <a:spcPts val="0"/>
-              </a:spcBef>
-              <a:spcAft>
-                <a:spcPts val="0"/>
-              </a:spcAft>
-              <a:buClr>
-                <a:srgbClr val="000000"/>
-              </a:buClr>
-              <a:buSzPts val="1200"/>
-              <a:buFont typeface="Arial" panose="020B0604020202020204"/>
-              <a:buNone/>
-              <a:defRPr/>
-            </a:pPr>
-            <a:fld id="{00000000-1234-1234-1234-123412341234}" type="slidenum">
-              <a:rPr kumimoji="0" lang="en-US" sz="1200" b="0" i="0" u="none" strike="noStrike" kern="0" cap="none" spc="0" normalizeH="0" baseline="0" noProof="0">
-                <a:ln>
-                  <a:noFill/>
-                </a:ln>
-                <a:solidFill>
-                  <a:srgbClr val="898989"/>
-                </a:solidFill>
-                <a:effectLst/>
-                <a:uLnTx/>
-                <a:uFillTx/>
-                <a:latin typeface="Calibri" panose="020F0502020204030204"/>
-                <a:ea typeface="Calibri" panose="020F0502020204030204"/>
-                <a:cs typeface="Calibri" panose="020F0502020204030204"/>
-                <a:sym typeface="Calibri" panose="020F0502020204030204"/>
-              </a:rPr>
-              <a:t>10</a:t>
-            </a:fld>
-            <a:endParaRPr kumimoji="0" lang="en-US" sz="1200" b="0" i="0" u="none" strike="noStrike" kern="0" cap="none" spc="0" normalizeH="0" baseline="0" noProof="0">
-              <a:ln>
-                <a:noFill/>
-              </a:ln>
-              <a:solidFill>
-                <a:srgbClr val="898989"/>
-              </a:solidFill>
-              <a:effectLst/>
-              <a:uLnTx/>
-              <a:uFillTx/>
-              <a:latin typeface="Calibri" panose="020F0502020204030204"/>
-              <a:ea typeface="Calibri" panose="020F0502020204030204"/>
-              <a:cs typeface="Calibri" panose="020F0502020204030204"/>
-              <a:sym typeface="Calibri" panose="020F0502020204030204"/>
-            </a:endParaRPr>
-          </a:p>
-        </p:txBody>
-      </p:sp>
-      <p:sp>
-        <p:nvSpPr>
-          <p:cNvPr id="104" name="Google Shape;104;g2c78129218a_0_8"/>
-          <p:cNvSpPr txBox="1"/>
-          <p:nvPr/>
-        </p:nvSpPr>
-        <p:spPr>
-          <a:xfrm>
-            <a:off x="599825" y="2179350"/>
-            <a:ext cx="7737900" cy="1954800"/>
-          </a:xfrm>
-          <a:prstGeom prst="rect">
-            <a:avLst/>
-          </a:prstGeom>
-          <a:noFill/>
-          <a:ln>
-            <a:noFill/>
-          </a:ln>
-        </p:spPr>
-        <p:txBody>
-          <a:bodyPr spcFirstLastPara="1" wrap="square" lIns="91425" tIns="91425" rIns="91425" bIns="91425" anchor="t" anchorCtr="0">
-            <a:spAutoFit/>
-          </a:bodyPr>
-          <a:lstStyle/>
-          <a:p>
-            <a:pPr marL="0" marR="0" lvl="0" indent="0" algn="ctr" defTabSz="914400" rtl="0" eaLnBrk="1" fontAlgn="auto" latinLnBrk="0" hangingPunct="1">
-              <a:lnSpc>
-                <a:spcPct val="100000"/>
-              </a:lnSpc>
-              <a:spcBef>
-                <a:spcPts val="0"/>
-              </a:spcBef>
-              <a:spcAft>
-                <a:spcPts val="0"/>
-              </a:spcAft>
-              <a:buClr>
-                <a:srgbClr val="000000"/>
-              </a:buClr>
-              <a:buSzTx/>
-              <a:buFont typeface="Arial" panose="020B0604020202020204"/>
-              <a:buNone/>
-              <a:defRPr/>
-            </a:pPr>
-            <a:r>
-              <a:rPr kumimoji="0" lang="en-US" sz="9600" b="1" i="0" u="none" strike="noStrike" kern="0" cap="none" spc="0" normalizeH="0" baseline="0" noProof="0">
-                <a:ln>
-                  <a:noFill/>
-                </a:ln>
-                <a:solidFill>
-                  <a:srgbClr val="D6E3BC"/>
-                </a:solidFill>
-                <a:effectLst/>
-                <a:uLnTx/>
-                <a:uFillTx/>
-                <a:latin typeface="Times New Roman" panose="02020603050405020304"/>
-                <a:ea typeface="Times New Roman" panose="02020603050405020304"/>
-                <a:cs typeface="Times New Roman" panose="02020603050405020304"/>
-                <a:sym typeface="Times New Roman" panose="02020603050405020304"/>
-              </a:rPr>
-              <a:t>Thank</a:t>
-            </a:r>
-            <a:r>
-              <a:rPr kumimoji="0" lang="en-US" sz="11500" b="1" i="0" u="none" strike="noStrike" kern="0" cap="none" spc="0" normalizeH="0" baseline="0" noProof="0">
-                <a:ln>
-                  <a:noFill/>
-                </a:ln>
-                <a:solidFill>
-                  <a:srgbClr val="D6E3BC"/>
-                </a:solidFill>
-                <a:effectLst/>
-                <a:uLnTx/>
-                <a:uFillTx/>
-                <a:latin typeface="Arial" panose="020B0604020202020204"/>
-                <a:cs typeface="Arial" panose="020B0604020202020204"/>
-                <a:sym typeface="Arial" panose="020B0604020202020204"/>
-              </a:rPr>
-              <a:t>  you </a:t>
-            </a:r>
-            <a:endParaRPr kumimoji="0" sz="1400" b="0" i="0" u="none" strike="noStrike" kern="0" cap="none" spc="0" normalizeH="0" baseline="0" noProof="0">
-              <a:ln>
-                <a:noFill/>
-              </a:ln>
-              <a:solidFill>
-                <a:srgbClr val="000000"/>
-              </a:solidFill>
-              <a:effectLst/>
-              <a:uLnTx/>
-              <a:uFillTx/>
-              <a:latin typeface="Arial" panose="020B0604020202020204"/>
               <a:cs typeface="Arial" panose="020B0604020202020204"/>
               <a:sym typeface="Arial" panose="020B0604020202020204"/>
             </a:endParaRPr>
@@ -23450,270 +23277,6 @@
       </p:grpSpPr>
       <p:sp>
         <p:nvSpPr>
-          <p:cNvPr id="2" name="Title 1"/>
-          <p:cNvSpPr>
-            <a:spLocks noGrp="1"/>
-          </p:cNvSpPr>
-          <p:nvPr>
-            <p:ph type="title"/>
-          </p:nvPr>
-        </p:nvSpPr>
-        <p:spPr/>
-        <p:txBody>
-          <a:bodyPr/>
-          <a:lstStyle/>
-          <a:p>
-            <a:r>
-              <a:rPr lang="en-US" sz="3800" b="1" dirty="0" smtClean="0">
-                <a:latin typeface="Times New Roman" panose="02020603050405020304" pitchFamily="18" charset="0"/>
-                <a:cs typeface="Times New Roman" panose="02020603050405020304" pitchFamily="18" charset="0"/>
-              </a:rPr>
-              <a:t>PROJECT OVERVIEW</a:t>
-            </a:r>
-            <a:endParaRPr lang="en-US" sz="3800" b="1" dirty="0">
-              <a:latin typeface="Times New Roman" panose="02020603050405020304" pitchFamily="18" charset="0"/>
-              <a:cs typeface="Times New Roman" panose="02020603050405020304" pitchFamily="18" charset="0"/>
-            </a:endParaRPr>
-          </a:p>
-        </p:txBody>
-      </p:sp>
-      <p:pic>
-        <p:nvPicPr>
-          <p:cNvPr id="5" name="Picture 4"/>
-          <p:cNvPicPr>
-            <a:picLocks noChangeAspect="1"/>
-          </p:cNvPicPr>
-          <p:nvPr/>
-        </p:nvPicPr>
-        <p:blipFill>
-          <a:blip r:embed="rId2"/>
-          <a:stretch>
-            <a:fillRect/>
-          </a:stretch>
-        </p:blipFill>
-        <p:spPr>
-          <a:xfrm>
-            <a:off x="71021" y="942145"/>
-            <a:ext cx="4516030" cy="2307082"/>
-          </a:xfrm>
-          <a:prstGeom prst="rect">
-            <a:avLst/>
-          </a:prstGeom>
-          <a:ln>
-            <a:noFill/>
-          </a:ln>
-          <a:effectLst>
-            <a:outerShdw blurRad="292100" dist="139700" dir="2700000" algn="tl" rotWithShape="0">
-              <a:srgbClr val="333333">
-                <a:alpha val="65000"/>
-              </a:srgbClr>
-            </a:outerShdw>
-          </a:effectLst>
-        </p:spPr>
-      </p:pic>
-      <p:sp>
-        <p:nvSpPr>
-          <p:cNvPr id="4" name="Slide Number Placeholder 3"/>
-          <p:cNvSpPr>
-            <a:spLocks noGrp="1"/>
-          </p:cNvSpPr>
-          <p:nvPr>
-            <p:ph type="sldNum" idx="12"/>
-          </p:nvPr>
-        </p:nvSpPr>
-        <p:spPr/>
-        <p:txBody>
-          <a:bodyPr/>
-          <a:lstStyle/>
-          <a:p>
-            <a:pPr marL="0" marR="0" lvl="0" indent="0" algn="r" defTabSz="914400" rtl="0" eaLnBrk="1" fontAlgn="auto" latinLnBrk="0" hangingPunct="1">
-              <a:lnSpc>
-                <a:spcPct val="100000"/>
-              </a:lnSpc>
-              <a:spcBef>
-                <a:spcPts val="0"/>
-              </a:spcBef>
-              <a:spcAft>
-                <a:spcPts val="0"/>
-              </a:spcAft>
-              <a:buClr>
-                <a:srgbClr val="000000"/>
-              </a:buClr>
-              <a:buSzPts val="1200"/>
-              <a:buFont typeface="Arial" panose="020B0604020202020204"/>
-              <a:buNone/>
-              <a:defRPr/>
-            </a:pPr>
-            <a:fld id="{00000000-1234-1234-1234-123412341234}" type="slidenum">
-              <a:rPr kumimoji="0" lang="en-US" sz="1200" b="0" i="0" u="none" strike="noStrike" kern="0" cap="none" spc="0" normalizeH="0" baseline="0" noProof="0" smtClean="0">
-                <a:ln>
-                  <a:noFill/>
-                </a:ln>
-                <a:solidFill>
-                  <a:srgbClr val="898989"/>
-                </a:solidFill>
-                <a:effectLst/>
-                <a:uLnTx/>
-                <a:uFillTx/>
-                <a:latin typeface="Calibri" panose="020F0502020204030204"/>
-                <a:ea typeface="Calibri" panose="020F0502020204030204"/>
-                <a:cs typeface="Calibri" panose="020F0502020204030204"/>
-                <a:sym typeface="Calibri" panose="020F0502020204030204"/>
-              </a:rPr>
-              <a:t>7</a:t>
-            </a:fld>
-            <a:endParaRPr kumimoji="0" lang="en-US" sz="1200" b="0" i="0" u="none" strike="noStrike" kern="0" cap="none" spc="0" normalizeH="0" baseline="0" noProof="0">
-              <a:ln>
-                <a:noFill/>
-              </a:ln>
-              <a:solidFill>
-                <a:srgbClr val="898989"/>
-              </a:solidFill>
-              <a:effectLst/>
-              <a:uLnTx/>
-              <a:uFillTx/>
-              <a:latin typeface="Calibri" panose="020F0502020204030204"/>
-              <a:ea typeface="Calibri" panose="020F0502020204030204"/>
-              <a:cs typeface="Calibri" panose="020F0502020204030204"/>
-              <a:sym typeface="Calibri" panose="020F0502020204030204"/>
-            </a:endParaRPr>
-          </a:p>
-        </p:txBody>
-      </p:sp>
-      <p:pic>
-        <p:nvPicPr>
-          <p:cNvPr id="6" name="Picture 5"/>
-          <p:cNvPicPr>
-            <a:picLocks noChangeAspect="1"/>
-          </p:cNvPicPr>
-          <p:nvPr/>
-        </p:nvPicPr>
-        <p:blipFill>
-          <a:blip r:embed="rId3"/>
-          <a:stretch>
-            <a:fillRect/>
-          </a:stretch>
-        </p:blipFill>
-        <p:spPr>
-          <a:xfrm>
-            <a:off x="71021" y="3825295"/>
-            <a:ext cx="4537616" cy="2424585"/>
-          </a:xfrm>
-          <a:prstGeom prst="rect">
-            <a:avLst/>
-          </a:prstGeom>
-          <a:ln>
-            <a:noFill/>
-          </a:ln>
-          <a:effectLst>
-            <a:outerShdw blurRad="292100" dist="139700" dir="2700000" algn="tl" rotWithShape="0">
-              <a:srgbClr val="333333">
-                <a:alpha val="65000"/>
-              </a:srgbClr>
-            </a:outerShdw>
-          </a:effectLst>
-        </p:spPr>
-      </p:pic>
-      <p:pic>
-        <p:nvPicPr>
-          <p:cNvPr id="7" name="Picture 6"/>
-          <p:cNvPicPr>
-            <a:picLocks noChangeAspect="1"/>
-          </p:cNvPicPr>
-          <p:nvPr/>
-        </p:nvPicPr>
-        <p:blipFill>
-          <a:blip r:embed="rId4"/>
-          <a:stretch>
-            <a:fillRect/>
-          </a:stretch>
-        </p:blipFill>
-        <p:spPr>
-          <a:xfrm>
-            <a:off x="4807896" y="942146"/>
-            <a:ext cx="4034264" cy="2307082"/>
-          </a:xfrm>
-          <a:prstGeom prst="rect">
-            <a:avLst/>
-          </a:prstGeom>
-          <a:ln>
-            <a:noFill/>
-          </a:ln>
-          <a:effectLst>
-            <a:outerShdw blurRad="292100" dist="139700" dir="2700000" algn="tl" rotWithShape="0">
-              <a:srgbClr val="333333">
-                <a:alpha val="65000"/>
-              </a:srgbClr>
-            </a:outerShdw>
-          </a:effectLst>
-        </p:spPr>
-      </p:pic>
-      <p:pic>
-        <p:nvPicPr>
-          <p:cNvPr id="3" name="Picture 2"/>
-          <p:cNvPicPr>
-            <a:picLocks noChangeAspect="1"/>
-          </p:cNvPicPr>
-          <p:nvPr/>
-        </p:nvPicPr>
-        <p:blipFill>
-          <a:blip r:embed="rId5"/>
-          <a:stretch>
-            <a:fillRect/>
-          </a:stretch>
-        </p:blipFill>
-        <p:spPr>
-          <a:xfrm>
-            <a:off x="4807897" y="3825294"/>
-            <a:ext cx="4034264" cy="2424585"/>
-          </a:xfrm>
-          <a:prstGeom prst="rect">
-            <a:avLst/>
-          </a:prstGeom>
-          <a:ln>
-            <a:noFill/>
-          </a:ln>
-          <a:effectLst>
-            <a:outerShdw blurRad="292100" dist="139700" dir="2700000" algn="tl" rotWithShape="0">
-              <a:srgbClr val="333333">
-                <a:alpha val="65000"/>
-              </a:srgbClr>
-            </a:outerShdw>
-          </a:effectLst>
-        </p:spPr>
-      </p:pic>
-    </p:spTree>
-    <p:extLst>
-      <p:ext uri="{BB962C8B-B14F-4D97-AF65-F5344CB8AC3E}">
-        <p14:creationId xmlns:p14="http://schemas.microsoft.com/office/powerpoint/2010/main" val="1597528413"/>
-      </p:ext>
-    </p:extLst>
-  </p:cSld>
-  <p:clrMapOvr>
-    <a:masterClrMapping/>
-  </p:clrMapOvr>
-</p:sld>
-</file>
-
-<file path=ppt/slides/slide8.xml><?xml version="1.0" encoding="utf-8"?>
-<p:sld xmlns:a="http://schemas.openxmlformats.org/drawingml/2006/main" xmlns:r="http://schemas.openxmlformats.org/officeDocument/2006/relationships" xmlns:p="http://schemas.openxmlformats.org/presentationml/2006/main">
-  <p:cSld>
-    <p:spTree>
-      <p:nvGrpSpPr>
-        <p:cNvPr id="1" name=""/>
-        <p:cNvGrpSpPr/>
-        <p:nvPr/>
-      </p:nvGrpSpPr>
-      <p:grpSpPr>
-        <a:xfrm>
-          <a:off x="0" y="0"/>
-          <a:ext cx="0" cy="0"/>
-          <a:chOff x="0" y="0"/>
-          <a:chExt cx="0" cy="0"/>
-        </a:xfrm>
-      </p:grpSpPr>
-      <p:sp>
-        <p:nvSpPr>
           <p:cNvPr id="76" name="PlaceHolder 1"/>
           <p:cNvSpPr>
             <a:spLocks noGrp="1"/>
@@ -23769,7 +23332,7 @@
         </p:nvSpPr>
         <p:spPr>
           <a:xfrm>
-            <a:off x="362529" y="1150879"/>
+            <a:off x="318140" y="1372821"/>
             <a:ext cx="8229600" cy="4525963"/>
           </a:xfrm>
           <a:prstGeom prst="rect">
@@ -23806,14 +23369,7 @@
                 <a:latin typeface="Times New Roman" panose="02020603050405020304" pitchFamily="18" charset="0"/>
                 <a:cs typeface="Times New Roman" panose="02020603050405020304" pitchFamily="18" charset="0"/>
               </a:rPr>
-              <a:t>:</a:t>
-            </a:r>
-            <a:r>
-              <a:rPr lang="en-US" sz="1800" dirty="0" smtClean="0">
-                <a:latin typeface="Times New Roman" panose="02020603050405020304" pitchFamily="18" charset="0"/>
-                <a:cs typeface="Times New Roman" panose="02020603050405020304" pitchFamily="18" charset="0"/>
-              </a:rPr>
-              <a:t> </a:t>
+              <a:t>: </a:t>
             </a:r>
             <a:r>
               <a:rPr lang="en-US" sz="1800" dirty="0">
@@ -23865,14 +23421,7 @@
                 <a:latin typeface="Times New Roman" panose="02020603050405020304" pitchFamily="18" charset="0"/>
                 <a:cs typeface="Times New Roman" panose="02020603050405020304" pitchFamily="18" charset="0"/>
               </a:rPr>
-              <a:t>:</a:t>
-            </a:r>
-            <a:r>
-              <a:rPr lang="en-US" sz="1800" dirty="0" smtClean="0">
-                <a:latin typeface="Times New Roman" panose="02020603050405020304" pitchFamily="18" charset="0"/>
-                <a:cs typeface="Times New Roman" panose="02020603050405020304" pitchFamily="18" charset="0"/>
-              </a:rPr>
-              <a:t> </a:t>
+              <a:t>: </a:t>
             </a:r>
             <a:r>
               <a:rPr lang="en-US" sz="1800" dirty="0">
@@ -23980,14 +23529,7 @@
                 <a:latin typeface="Times New Roman" panose="02020603050405020304" pitchFamily="18" charset="0"/>
                 <a:cs typeface="Times New Roman" panose="02020603050405020304" pitchFamily="18" charset="0"/>
               </a:rPr>
-              <a:t>:</a:t>
-            </a:r>
-            <a:r>
-              <a:rPr lang="en-US" sz="1800" dirty="0" smtClean="0">
-                <a:latin typeface="Times New Roman" panose="02020603050405020304" pitchFamily="18" charset="0"/>
-                <a:cs typeface="Times New Roman" panose="02020603050405020304" pitchFamily="18" charset="0"/>
-              </a:rPr>
-              <a:t> </a:t>
+              <a:t>: </a:t>
             </a:r>
             <a:r>
               <a:rPr lang="en-US" sz="1800" dirty="0">
@@ -24004,53 +23546,6 @@
               <a:t>.</a:t>
             </a:r>
           </a:p>
-          <a:p>
-            <a:pPr marL="0" indent="0" defTabSz="457200">
-              <a:spcBef>
-                <a:spcPts val="640"/>
-              </a:spcBef>
-              <a:buClr>
-                <a:srgbClr val="000000"/>
-              </a:buClr>
-              <a:buNone/>
-            </a:pPr>
-            <a:endParaRPr lang="en-US" sz="1800" dirty="0" smtClean="0">
-              <a:latin typeface="Times New Roman" panose="02020603050405020304" pitchFamily="18" charset="0"/>
-              <a:cs typeface="Times New Roman" panose="02020603050405020304" pitchFamily="18" charset="0"/>
-            </a:endParaRPr>
-          </a:p>
-          <a:p>
-            <a:pPr marL="342900" defTabSz="457200">
-              <a:spcBef>
-                <a:spcPts val="640"/>
-              </a:spcBef>
-              <a:buClr>
-                <a:srgbClr val="000000"/>
-              </a:buClr>
-            </a:pPr>
-            <a:r>
-              <a:rPr lang="en-US" sz="1800" b="1" dirty="0">
-                <a:latin typeface="Times New Roman" panose="02020603050405020304" pitchFamily="18" charset="0"/>
-                <a:cs typeface="Times New Roman" panose="02020603050405020304" pitchFamily="18" charset="0"/>
-              </a:rPr>
-              <a:t>Responsive &amp; User-Friendly Interface</a:t>
-            </a:r>
-            <a:r>
-              <a:rPr lang="en-US" sz="1800" dirty="0">
-                <a:latin typeface="Times New Roman" panose="02020603050405020304" pitchFamily="18" charset="0"/>
-                <a:cs typeface="Times New Roman" panose="02020603050405020304" pitchFamily="18" charset="0"/>
-              </a:rPr>
-              <a:t>: Designed with a clean and intuitive UI, the platform works smoothly across desktop, tablet, and mobile devices.</a:t>
-            </a:r>
-            <a:endParaRPr lang="en-US" sz="1800" u="none" strike="noStrike" dirty="0">
-              <a:solidFill>
-                <a:schemeClr val="dk1"/>
-              </a:solidFill>
-              <a:uFillTx/>
-              <a:latin typeface="Times New Roman" panose="02020603050405020304" pitchFamily="18" charset="0"/>
-              <a:cs typeface="Times New Roman" panose="02020603050405020304" pitchFamily="18" charset="0"/>
-            </a:endParaRPr>
-          </a:p>
         </p:txBody>
       </p:sp>
     </p:spTree>
@@ -24061,7 +23556,7 @@
 </p:sld>
 </file>
 
-<file path=ppt/slides/slide9.xml><?xml version="1.0" encoding="utf-8"?>
+<file path=ppt/slides/slide8.xml><?xml version="1.0" encoding="utf-8"?>
 <p:sld xmlns:a="http://schemas.openxmlformats.org/drawingml/2006/main" xmlns:r="http://schemas.openxmlformats.org/officeDocument/2006/relationships" xmlns:p="http://schemas.openxmlformats.org/presentationml/2006/main">
   <p:cSld>
     <p:spTree>
@@ -24481,6 +23976,209 @@
               </a:rPr>
               <a:t>In the future, the platform can be enhanced with features like cloud storage integration, file preview, and real-time collaboration. </a:t>
             </a:r>
+          </a:p>
+        </p:txBody>
+      </p:sp>
+    </p:spTree>
+  </p:cSld>
+  <p:clrMapOvr>
+    <a:masterClrMapping/>
+  </p:clrMapOvr>
+</p:sld>
+</file>
+
+<file path=ppt/slides/slide9.xml><?xml version="1.0" encoding="utf-8"?>
+<p:sld xmlns:a="http://schemas.openxmlformats.org/drawingml/2006/main" xmlns:r="http://schemas.openxmlformats.org/officeDocument/2006/relationships" xmlns:p="http://schemas.openxmlformats.org/presentationml/2006/main">
+  <p:cSld>
+    <p:spTree>
+      <p:nvGrpSpPr>
+        <p:cNvPr id="1" name="Shape 101"/>
+        <p:cNvGrpSpPr/>
+        <p:nvPr/>
+      </p:nvGrpSpPr>
+      <p:grpSpPr>
+        <a:xfrm>
+          <a:off x="0" y="0"/>
+          <a:ext cx="0" cy="0"/>
+          <a:chOff x="0" y="0"/>
+          <a:chExt cx="0" cy="0"/>
+        </a:xfrm>
+      </p:grpSpPr>
+      <p:sp>
+        <p:nvSpPr>
+          <p:cNvPr id="102" name="Google Shape;102;g2c78129218a_0_8"/>
+          <p:cNvSpPr txBox="1">
+            <a:spLocks noGrp="1"/>
+          </p:cNvSpPr>
+          <p:nvPr>
+            <p:ph type="sldNum" idx="12"/>
+          </p:nvPr>
+        </p:nvSpPr>
+        <p:spPr>
+          <a:xfrm>
+            <a:off x="6553200" y="6356350"/>
+            <a:ext cx="2133600" cy="365100"/>
+          </a:xfrm>
+          <a:prstGeom prst="rect">
+            <a:avLst/>
+          </a:prstGeom>
+          <a:noFill/>
+          <a:ln>
+            <a:noFill/>
+          </a:ln>
+        </p:spPr>
+        <p:txBody>
+          <a:bodyPr spcFirstLastPara="1" wrap="square" lIns="91425" tIns="45700" rIns="91425" bIns="45700" anchor="ctr" anchorCtr="0">
+            <a:noAutofit/>
+          </a:bodyPr>
+          <a:lstStyle/>
+          <a:p>
+            <a:pPr marL="0" marR="0" lvl="0" indent="0" algn="r" defTabSz="914400" rtl="0" eaLnBrk="1" fontAlgn="auto" latinLnBrk="0" hangingPunct="1">
+              <a:lnSpc>
+                <a:spcPct val="100000"/>
+              </a:lnSpc>
+              <a:spcBef>
+                <a:spcPts val="0"/>
+              </a:spcBef>
+              <a:spcAft>
+                <a:spcPts val="0"/>
+              </a:spcAft>
+              <a:buClr>
+                <a:srgbClr val="000000"/>
+              </a:buClr>
+              <a:buSzPts val="1200"/>
+              <a:buFont typeface="Arial" panose="020B0604020202020204"/>
+              <a:buNone/>
+              <a:defRPr/>
+            </a:pPr>
+            <a:fld id="{00000000-1234-1234-1234-123412341234}" type="slidenum">
+              <a:rPr kumimoji="0" lang="en-US" sz="1200" b="0" i="0" u="none" strike="noStrike" kern="0" cap="none" spc="0" normalizeH="0" baseline="0" noProof="0">
+                <a:ln>
+                  <a:noFill/>
+                </a:ln>
+                <a:solidFill>
+                  <a:srgbClr val="898989"/>
+                </a:solidFill>
+                <a:effectLst/>
+                <a:uLnTx/>
+                <a:uFillTx/>
+                <a:latin typeface="Calibri" panose="020F0502020204030204"/>
+                <a:ea typeface="Calibri" panose="020F0502020204030204"/>
+                <a:cs typeface="Calibri" panose="020F0502020204030204"/>
+                <a:sym typeface="Calibri" panose="020F0502020204030204"/>
+              </a:rPr>
+              <a:t>9</a:t>
+            </a:fld>
+            <a:endParaRPr kumimoji="0" lang="en-US" sz="1200" b="0" i="0" u="none" strike="noStrike" kern="0" cap="none" spc="0" normalizeH="0" baseline="0" noProof="0">
+              <a:ln>
+                <a:noFill/>
+              </a:ln>
+              <a:solidFill>
+                <a:srgbClr val="898989"/>
+              </a:solidFill>
+              <a:effectLst/>
+              <a:uLnTx/>
+              <a:uFillTx/>
+              <a:latin typeface="Calibri" panose="020F0502020204030204"/>
+              <a:ea typeface="Calibri" panose="020F0502020204030204"/>
+              <a:cs typeface="Calibri" panose="020F0502020204030204"/>
+              <a:sym typeface="Calibri" panose="020F0502020204030204"/>
+            </a:endParaRPr>
+          </a:p>
+        </p:txBody>
+      </p:sp>
+      <p:sp>
+        <p:nvSpPr>
+          <p:cNvPr id="104" name="Google Shape;104;g2c78129218a_0_8"/>
+          <p:cNvSpPr txBox="1"/>
+          <p:nvPr/>
+        </p:nvSpPr>
+        <p:spPr>
+          <a:xfrm>
+            <a:off x="599825" y="2179350"/>
+            <a:ext cx="7737900" cy="1954800"/>
+          </a:xfrm>
+          <a:prstGeom prst="rect">
+            <a:avLst/>
+          </a:prstGeom>
+          <a:noFill/>
+          <a:ln>
+            <a:noFill/>
+          </a:ln>
+        </p:spPr>
+        <p:txBody>
+          <a:bodyPr spcFirstLastPara="1" wrap="square" lIns="91425" tIns="91425" rIns="91425" bIns="91425" anchor="t" anchorCtr="0">
+            <a:spAutoFit/>
+          </a:bodyPr>
+          <a:lstStyle/>
+          <a:p>
+            <a:pPr marL="0" marR="0" lvl="0" indent="0" algn="ctr" defTabSz="914400" rtl="0" eaLnBrk="1" fontAlgn="auto" latinLnBrk="0" hangingPunct="1">
+              <a:lnSpc>
+                <a:spcPct val="100000"/>
+              </a:lnSpc>
+              <a:spcBef>
+                <a:spcPts val="0"/>
+              </a:spcBef>
+              <a:spcAft>
+                <a:spcPts val="0"/>
+              </a:spcAft>
+              <a:buClr>
+                <a:srgbClr val="000000"/>
+              </a:buClr>
+              <a:buSzTx/>
+              <a:buFont typeface="Arial" panose="020B0604020202020204"/>
+              <a:buNone/>
+              <a:defRPr/>
+            </a:pPr>
+            <a:r>
+              <a:rPr kumimoji="0" lang="en-US" sz="9600" b="1" i="0" u="none" strike="noStrike" kern="0" cap="none" spc="0" normalizeH="0" baseline="0" noProof="0">
+                <a:ln>
+                  <a:noFill/>
+                </a:ln>
+                <a:solidFill>
+                  <a:srgbClr val="D6E3BC"/>
+                </a:solidFill>
+                <a:effectLst/>
+                <a:uLnTx/>
+                <a:uFillTx/>
+                <a:latin typeface="Times New Roman" panose="02020603050405020304"/>
+                <a:ea typeface="Times New Roman" panose="02020603050405020304"/>
+                <a:cs typeface="Times New Roman" panose="02020603050405020304"/>
+                <a:sym typeface="Times New Roman" panose="02020603050405020304"/>
+              </a:rPr>
+              <a:t>Thank</a:t>
+            </a:r>
+            <a:r>
+              <a:rPr kumimoji="0" lang="en-US" sz="11500" b="1" i="0" u="none" strike="noStrike" kern="0" cap="none" spc="0" normalizeH="0" baseline="0" noProof="0">
+                <a:ln>
+                  <a:noFill/>
+                </a:ln>
+                <a:solidFill>
+                  <a:srgbClr val="D6E3BC"/>
+                </a:solidFill>
+                <a:effectLst/>
+                <a:uLnTx/>
+                <a:uFillTx/>
+                <a:latin typeface="Arial" panose="020B0604020202020204"/>
+                <a:cs typeface="Arial" panose="020B0604020202020204"/>
+                <a:sym typeface="Arial" panose="020B0604020202020204"/>
+              </a:rPr>
+              <a:t>  you </a:t>
+            </a:r>
+            <a:endParaRPr kumimoji="0" sz="1400" b="0" i="0" u="none" strike="noStrike" kern="0" cap="none" spc="0" normalizeH="0" baseline="0" noProof="0">
+              <a:ln>
+                <a:noFill/>
+              </a:ln>
+              <a:solidFill>
+                <a:srgbClr val="000000"/>
+              </a:solidFill>
+              <a:effectLst/>
+              <a:uLnTx/>
+              <a:uFillTx/>
+              <a:latin typeface="Arial" panose="020B0604020202020204"/>
+              <a:cs typeface="Arial" panose="020B0604020202020204"/>
+              <a:sym typeface="Arial" panose="020B0604020202020204"/>
+            </a:endParaRPr>
           </a:p>
         </p:txBody>
       </p:sp>
